--- a/assets/pptx/catalog-763.pptx
+++ b/assets/pptx/catalog-763.pptx
@@ -3327,7 +3327,7 @@
                 <a:ea typeface="Ebrima"/>
                 <a:cs typeface="Ebrima"/>
               </a:rPr>
-              <a:t>ልጆቼ አይዟችሁ በለን ጌታ (2x)</a:t>
+              <a:t>ልጆቼ አይዟችሁ በለን ጌታ 2x</a:t>
             </a:r>
           </a:p>
         </p:txBody>
@@ -3662,7 +3662,7 @@
                 <a:ea typeface="Ebrima"/>
                 <a:cs typeface="Ebrima"/>
               </a:rPr>
-              <a:t>ተነስ ተነስ የእግዚአብሔር ክንድ ሆይ ተነስ (2x)</a:t>
+              <a:t>ተነስ ተነስ የእግዚአብሔር ክንድ ሆይ ተነስ 2x</a:t>
             </a:r>
           </a:p>
         </p:txBody>
@@ -4064,7 +4064,7 @@
                 <a:ea typeface="Ebrima"/>
                 <a:cs typeface="Ebrima"/>
               </a:rPr>
-              <a:t>ለዘለዓለም ክበር ሃሌሉያ (2x)</a:t>
+              <a:t>ለዘለዓለም ክበር ሃሌሉያ 2x</a:t>
             </a:r>
           </a:p>
         </p:txBody>
@@ -4332,7 +4332,7 @@
                 <a:ea typeface="Ebrima"/>
                 <a:cs typeface="Ebrima"/>
               </a:rPr>
-              <a:t>እሳት እሳት ያንን የመንፈስ ቅዱስ እሳት (2x)</a:t>
+              <a:t>እሳት እሳት ያንን የመንፈስ ቅዱስ እሳት 2x</a:t>
             </a:r>
           </a:p>
         </p:txBody>
